--- a/docs/Slide.pptx
+++ b/docs/Slide.pptx
@@ -2910,7 +2910,7 @@
           <a:p>
             <a:fld id="{5BCAD085-E8A6-8845-BD4E-CB4CCA059FC4}" type="datetimeFigureOut">
               <a:rPr lang="en-US" smtClean="0"/>
-              <a:t>9/11/26</a:t>
+              <a:t>9/12/26</a:t>
             </a:fld>
             <a:endParaRPr lang="en-US"/>
           </a:p>
@@ -3078,7 +3078,7 @@
           <a:p>
             <a:fld id="{5BCAD085-E8A6-8845-BD4E-CB4CCA059FC4}" type="datetimeFigureOut">
               <a:rPr lang="en-US" smtClean="0"/>
-              <a:t>9/11/26</a:t>
+              <a:t>9/12/26</a:t>
             </a:fld>
             <a:endParaRPr lang="en-US"/>
           </a:p>
@@ -3256,7 +3256,7 @@
           <a:p>
             <a:fld id="{5BCAD085-E8A6-8845-BD4E-CB4CCA059FC4}" type="datetimeFigureOut">
               <a:rPr lang="en-US" smtClean="0"/>
-              <a:t>9/11/26</a:t>
+              <a:t>9/12/26</a:t>
             </a:fld>
             <a:endParaRPr lang="en-US"/>
           </a:p>
@@ -3424,7 +3424,7 @@
           <a:p>
             <a:fld id="{5BCAD085-E8A6-8845-BD4E-CB4CCA059FC4}" type="datetimeFigureOut">
               <a:rPr lang="en-US" smtClean="0"/>
-              <a:t>9/11/26</a:t>
+              <a:t>9/12/26</a:t>
             </a:fld>
             <a:endParaRPr lang="en-US"/>
           </a:p>
@@ -3669,7 +3669,7 @@
           <a:p>
             <a:fld id="{5BCAD085-E8A6-8845-BD4E-CB4CCA059FC4}" type="datetimeFigureOut">
               <a:rPr lang="en-US" smtClean="0"/>
-              <a:t>9/11/26</a:t>
+              <a:t>9/12/26</a:t>
             </a:fld>
             <a:endParaRPr lang="en-US"/>
           </a:p>
@@ -3954,7 +3954,7 @@
           <a:p>
             <a:fld id="{5BCAD085-E8A6-8845-BD4E-CB4CCA059FC4}" type="datetimeFigureOut">
               <a:rPr lang="en-US" smtClean="0"/>
-              <a:t>9/11/26</a:t>
+              <a:t>9/12/26</a:t>
             </a:fld>
             <a:endParaRPr lang="en-US"/>
           </a:p>
@@ -4373,7 +4373,7 @@
           <a:p>
             <a:fld id="{5BCAD085-E8A6-8845-BD4E-CB4CCA059FC4}" type="datetimeFigureOut">
               <a:rPr lang="en-US" smtClean="0"/>
-              <a:t>9/11/26</a:t>
+              <a:t>9/12/26</a:t>
             </a:fld>
             <a:endParaRPr lang="en-US"/>
           </a:p>
@@ -4490,7 +4490,7 @@
           <a:p>
             <a:fld id="{5BCAD085-E8A6-8845-BD4E-CB4CCA059FC4}" type="datetimeFigureOut">
               <a:rPr lang="en-US" smtClean="0"/>
-              <a:t>9/11/26</a:t>
+              <a:t>9/12/26</a:t>
             </a:fld>
             <a:endParaRPr lang="en-US"/>
           </a:p>
@@ -4585,7 +4585,7 @@
           <a:p>
             <a:fld id="{5BCAD085-E8A6-8845-BD4E-CB4CCA059FC4}" type="datetimeFigureOut">
               <a:rPr lang="en-US" smtClean="0"/>
-              <a:t>9/11/26</a:t>
+              <a:t>9/12/26</a:t>
             </a:fld>
             <a:endParaRPr lang="en-US"/>
           </a:p>
@@ -4860,7 +4860,7 @@
           <a:p>
             <a:fld id="{5BCAD085-E8A6-8845-BD4E-CB4CCA059FC4}" type="datetimeFigureOut">
               <a:rPr lang="en-US" smtClean="0"/>
-              <a:t>9/11/26</a:t>
+              <a:t>9/12/26</a:t>
             </a:fld>
             <a:endParaRPr lang="en-US"/>
           </a:p>
@@ -5112,7 +5112,7 @@
           <a:p>
             <a:fld id="{5BCAD085-E8A6-8845-BD4E-CB4CCA059FC4}" type="datetimeFigureOut">
               <a:rPr lang="en-US" smtClean="0"/>
-              <a:t>9/11/26</a:t>
+              <a:t>9/12/26</a:t>
             </a:fld>
             <a:endParaRPr lang="en-US"/>
           </a:p>
@@ -5323,7 +5323,7 @@
           <a:p>
             <a:fld id="{5BCAD085-E8A6-8845-BD4E-CB4CCA059FC4}" type="datetimeFigureOut">
               <a:rPr lang="en-US" smtClean="0"/>
-              <a:t>9/11/26</a:t>
+              <a:t>9/12/26</a:t>
             </a:fld>
             <a:endParaRPr lang="en-US"/>
           </a:p>
@@ -12461,14 +12461,56 @@
                     <a:lstStyle/>
                     <a:p>
                       <a:r>
-                        <a:rPr sz="1200" b="1">
+                        <a:rPr sz="1200" b="1" dirty="0" err="1">
                           <a:solidFill>
                             <a:srgbClr val="FFFFFF"/>
                           </a:solidFill>
                           <a:latin typeface="Arial"/>
                         </a:rPr>
-                        <a:t>Bộ dữ liệu</a:t>
-                      </a:r>
+                        <a:t>Bộ</a:t>
+                      </a:r>
+                      <a:r>
+                        <a:rPr sz="1200" b="1" dirty="0">
+                          <a:solidFill>
+                            <a:srgbClr val="FFFFFF"/>
+                          </a:solidFill>
+                          <a:latin typeface="Arial"/>
+                        </a:rPr>
+                        <a:t> </a:t>
+                      </a:r>
+                      <a:r>
+                        <a:rPr sz="1200" b="1" dirty="0" err="1">
+                          <a:solidFill>
+                            <a:srgbClr val="FFFFFF"/>
+                          </a:solidFill>
+                          <a:latin typeface="Arial"/>
+                        </a:rPr>
+                        <a:t>dữ</a:t>
+                      </a:r>
+                      <a:r>
+                        <a:rPr sz="1200" b="1" dirty="0">
+                          <a:solidFill>
+                            <a:srgbClr val="FFFFFF"/>
+                          </a:solidFill>
+                          <a:latin typeface="Arial"/>
+                        </a:rPr>
+                        <a:t> </a:t>
+                      </a:r>
+                      <a:r>
+                        <a:rPr sz="1200" b="1" dirty="0" err="1">
+                          <a:solidFill>
+                            <a:srgbClr val="FFFFFF"/>
+                          </a:solidFill>
+                          <a:latin typeface="Arial"/>
+                        </a:rPr>
+                        <a:t>liệu</a:t>
+                      </a:r>
+                      <a:endParaRPr sz="1200" b="1" dirty="0">
+                        <a:solidFill>
+                          <a:srgbClr val="FFFFFF"/>
+                        </a:solidFill>
+                        <a:latin typeface="Arial"/>
+                      </a:endParaRPr>
                     </a:p>
                   </a:txBody>
                   <a:tcPr marL="73152" marR="73152" marT="27432" marB="27432" anchor="ctr">
@@ -12912,8 +12954,8 @@
         </p:nvSpPr>
         <p:spPr>
           <a:xfrm>
-            <a:off x="502920" y="4299373"/>
-            <a:ext cx="11185855" cy="1502976"/>
+            <a:off x="502920" y="3976208"/>
+            <a:ext cx="11185855" cy="1690206"/>
           </a:xfrm>
           <a:prstGeom prst="rect">
             <a:avLst/>
@@ -12932,21 +12974,12 @@
               </a:spcAft>
             </a:pPr>
             <a:r>
-              <a:rPr lang="vi-VN" sz="1250" dirty="0">
-                <a:solidFill>
-                  <a:srgbClr val="444B52"/>
-                </a:solidFill>
-                <a:latin typeface="Arial"/>
-              </a:rPr>
-              <a:t>Nguồn dữ liệu đáng tin cậy vì chống lưng cho Kaggle là Google và WHO nên ta có thể chấp nhận độ tin cậy</a:t>
-            </a:r>
-          </a:p>
-          <a:p>
-            <a:pPr>
-              <a:spcAft>
-                <a:spcPts val="400"/>
-              </a:spcAft>
-            </a:pPr>
+              <a:rPr lang="en-VN" sz="1400" dirty="0"/>
+              <a:t>Nguồn dữ liệu là các dataset công khai trên Kaggle. Nhóm thực hiện kiểm tra chất lượng, tính phù hợp và đặc điểm của từng bộ dữ liệu trước khi sử dụng cho huấn luyện mô hình</a:t>
+            </a:r>
+            <a:br>
+              <a:rPr lang="en-VN" sz="1400" dirty="0"/>
+            </a:br>
             <a:endParaRPr lang="vi-VN" sz="1250" dirty="0">
               <a:solidFill>
                 <a:srgbClr val="444B52"/>

--- a/docs/Slide.pptx
+++ b/docs/Slide.pptx
@@ -5859,7 +5859,7 @@
         <p:spPr>
           <a:xfrm>
             <a:off x="822959" y="4702126"/>
-            <a:ext cx="10545775" cy="1769715"/>
+            <a:ext cx="10545775" cy="1554272"/>
           </a:xfrm>
           <a:prstGeom prst="rect">
             <a:avLst/>
@@ -5873,7 +5873,7 @@
           <a:lstStyle/>
           <a:p>
             <a:r>
-              <a:rPr sz="1400" b="1" dirty="0" err="1">
+              <a:rPr lang="vi-VN" sz="1400" b="1" dirty="0">
                 <a:solidFill>
                   <a:schemeClr val="accent1">
                     <a:lumMod val="20000"/>
@@ -5882,10 +5882,10 @@
                 </a:solidFill>
                 <a:latin typeface="Arial"/>
               </a:rPr>
-              <a:t>Tư</a:t>
-            </a:r>
-            <a:r>
-              <a:rPr sz="1400" b="1" dirty="0">
+              <a:t>Môn học: </a:t>
+            </a:r>
+            <a:r>
+              <a:rPr sz="1400" b="1" dirty="0" err="1">
                 <a:solidFill>
                   <a:schemeClr val="accent1">
                     <a:lumMod val="20000"/>
@@ -5894,10 +5894,10 @@
                 </a:solidFill>
                 <a:latin typeface="Arial"/>
               </a:rPr>
-              <a:t> </a:t>
-            </a:r>
-            <a:r>
-              <a:rPr sz="1400" b="1" dirty="0" err="1">
+              <a:t>Tư</a:t>
+            </a:r>
+            <a:r>
+              <a:rPr sz="1400" b="1" dirty="0">
                 <a:solidFill>
                   <a:schemeClr val="accent1">
                     <a:lumMod val="20000"/>
@@ -5906,10 +5906,10 @@
                 </a:solidFill>
                 <a:latin typeface="Arial"/>
               </a:rPr>
-              <a:t>duy</a:t>
-            </a:r>
-            <a:r>
-              <a:rPr sz="1400" b="1" dirty="0">
+              <a:t> </a:t>
+            </a:r>
+            <a:r>
+              <a:rPr sz="1400" b="1" dirty="0" err="1">
                 <a:solidFill>
                   <a:schemeClr val="accent1">
                     <a:lumMod val="20000"/>
@@ -5918,10 +5918,10 @@
                 </a:solidFill>
                 <a:latin typeface="Arial"/>
               </a:rPr>
-              <a:t> </a:t>
-            </a:r>
-            <a:r>
-              <a:rPr lang="vi-VN" sz="1400" b="1" dirty="0">
+              <a:t>duy</a:t>
+            </a:r>
+            <a:r>
+              <a:rPr sz="1400" b="1" dirty="0">
                 <a:solidFill>
                   <a:schemeClr val="accent1">
                     <a:lumMod val="20000"/>
@@ -5930,10 +5930,10 @@
                 </a:solidFill>
                 <a:latin typeface="Arial"/>
               </a:rPr>
-              <a:t>t</a:t>
-            </a:r>
-            <a:r>
-              <a:rPr sz="1400" b="1" dirty="0">
+              <a:t> </a:t>
+            </a:r>
+            <a:r>
+              <a:rPr lang="vi-VN" sz="1400" b="1" dirty="0">
                 <a:solidFill>
                   <a:schemeClr val="accent1">
                     <a:lumMod val="20000"/>
@@ -5942,10 +5942,10 @@
                 </a:solidFill>
                 <a:latin typeface="Arial"/>
               </a:rPr>
-              <a:t>rí </a:t>
-            </a:r>
-            <a:r>
-              <a:rPr sz="1400" b="1" dirty="0" err="1">
+              <a:t>t</a:t>
+            </a:r>
+            <a:r>
+              <a:rPr sz="1400" b="1" dirty="0">
                 <a:solidFill>
                   <a:schemeClr val="accent1">
                     <a:lumMod val="20000"/>
@@ -5954,10 +5954,10 @@
                 </a:solidFill>
                 <a:latin typeface="Arial"/>
               </a:rPr>
-              <a:t>tuệ</a:t>
-            </a:r>
-            <a:r>
-              <a:rPr sz="1400" b="1" dirty="0">
+              <a:t>rí </a:t>
+            </a:r>
+            <a:r>
+              <a:rPr sz="1400" b="1" dirty="0" err="1">
                 <a:solidFill>
                   <a:schemeClr val="accent1">
                     <a:lumMod val="20000"/>
@@ -5966,10 +5966,10 @@
                 </a:solidFill>
                 <a:latin typeface="Arial"/>
               </a:rPr>
-              <a:t> </a:t>
-            </a:r>
-            <a:r>
-              <a:rPr lang="vi-VN" sz="1400" b="1" dirty="0">
+              <a:t>tuệ</a:t>
+            </a:r>
+            <a:r>
+              <a:rPr sz="1400" b="1" dirty="0">
                 <a:solidFill>
                   <a:schemeClr val="accent1">
                     <a:lumMod val="20000"/>
@@ -5978,10 +5978,10 @@
                 </a:solidFill>
                 <a:latin typeface="Arial"/>
               </a:rPr>
-              <a:t>n</a:t>
-            </a:r>
-            <a:r>
-              <a:rPr sz="1400" b="1" dirty="0" err="1">
+              <a:t> </a:t>
+            </a:r>
+            <a:r>
+              <a:rPr lang="vi-VN" sz="1400" b="1" dirty="0">
                 <a:solidFill>
                   <a:schemeClr val="accent1">
                     <a:lumMod val="20000"/>
@@ -5990,10 +5990,10 @@
                 </a:solidFill>
                 <a:latin typeface="Arial"/>
               </a:rPr>
-              <a:t>hân</a:t>
-            </a:r>
-            <a:r>
-              <a:rPr sz="1400" b="1" dirty="0">
+              <a:t>n</a:t>
+            </a:r>
+            <a:r>
+              <a:rPr sz="1400" b="1" dirty="0" err="1">
                 <a:solidFill>
                   <a:schemeClr val="accent1">
                     <a:lumMod val="20000"/>
@@ -6002,10 +6002,10 @@
                 </a:solidFill>
                 <a:latin typeface="Arial"/>
               </a:rPr>
-              <a:t> </a:t>
-            </a:r>
-            <a:r>
-              <a:rPr sz="1400" b="1" dirty="0" err="1">
+              <a:t>hân</a:t>
+            </a:r>
+            <a:r>
+              <a:rPr sz="1400" b="1" dirty="0">
                 <a:solidFill>
                   <a:schemeClr val="accent1">
                     <a:lumMod val="20000"/>
@@ -6014,10 +6014,10 @@
                 </a:solidFill>
                 <a:latin typeface="Arial"/>
               </a:rPr>
-              <a:t>tạo</a:t>
-            </a:r>
-            <a:r>
-              <a:rPr sz="1400" b="1" dirty="0">
+              <a:t> </a:t>
+            </a:r>
+            <a:r>
+              <a:rPr sz="1400" b="1" dirty="0" err="1">
                 <a:solidFill>
                   <a:schemeClr val="accent1">
                     <a:lumMod val="20000"/>
@@ -6026,19 +6026,20 @@
                 </a:solidFill>
                 <a:latin typeface="Arial"/>
               </a:rPr>
+              <a:t>tạo</a:t>
+            </a:r>
+            <a:r>
+              <a:rPr sz="1400" b="1" dirty="0">
+                <a:solidFill>
+                  <a:schemeClr val="accent1">
+                    <a:lumMod val="20000"/>
+                    <a:lumOff val="80000"/>
+                  </a:schemeClr>
+                </a:solidFill>
+                <a:latin typeface="Arial"/>
+              </a:rPr>
               <a:t> (AI002)</a:t>
             </a:r>
-          </a:p>
-          <a:p>
-            <a:endParaRPr lang="vi-VN" sz="1400" b="1" dirty="0">
-              <a:solidFill>
-                <a:schemeClr val="accent1">
-                  <a:lumMod val="20000"/>
-                  <a:lumOff val="80000"/>
-                </a:schemeClr>
-              </a:solidFill>
-              <a:latin typeface="Arial"/>
-            </a:endParaRPr>
           </a:p>
           <a:p>
             <a:r>
@@ -8514,7 +8515,7 @@
                 </a:solidFill>
                 <a:latin typeface="Arial"/>
               </a:rPr>
-              <a:t>thuốc</a:t>
+              <a:t>thuố</a:t>
             </a:r>
             <a:r>
               <a:rPr lang="vi-VN" sz="1500" dirty="0">
@@ -8523,7 +8524,7 @@
                 </a:solidFill>
                 <a:latin typeface="Arial"/>
               </a:rPr>
-              <a:t> (chatbox có chặn loại câu hỏi này)</a:t>
+              <a:t>c</a:t>
             </a:r>
           </a:p>
           <a:p>

--- a/docs/Slide.pptx
+++ b/docs/Slide.pptx
@@ -8258,10 +8258,10 @@
       </p:sp>
       <p:pic>
         <p:nvPicPr>
-          <p:cNvPr id="3" name="Picture 2">
+          <p:cNvPr id="5" name="Picture 4">
             <a:extLst>
               <a:ext uri="{FF2B5EF4-FFF2-40B4-BE49-F238E27FC236}">
-                <a16:creationId xmlns:a16="http://schemas.microsoft.com/office/drawing/2014/main" id="{D592B35B-9759-7DC4-019F-224B26446D75}"/>
+                <a16:creationId xmlns:a16="http://schemas.microsoft.com/office/drawing/2014/main" id="{AD9F5A01-6092-9D72-943C-A745393F9486}"/>
               </a:ext>
             </a:extLst>
           </p:cNvPr>
@@ -8278,8 +8278,8 @@
         </p:blipFill>
         <p:spPr>
           <a:xfrm>
-            <a:off x="4915899" y="1579362"/>
-            <a:ext cx="6773028" cy="4096506"/>
+            <a:off x="4636546" y="1574499"/>
+            <a:ext cx="7465807" cy="4440965"/>
           </a:xfrm>
           <a:prstGeom prst="rect">
             <a:avLst/>
@@ -9026,7 +9026,24 @@
                 <a:latin typeface="Arial"/>
                 <a:hlinkClick r:id="rId3"/>
               </a:rPr>
-              <a:t>http://kaggle.com/datasets/jamaltariqcheema/pima-indians-diabetes-dataset</a:t>
+              <a:t>https://www.kaggle.com/datasets/jamaltariqcheema/pima-indians-diabetes-dataset</a:t>
+            </a:r>
+          </a:p>
+          <a:p>
+            <a:pPr>
+              <a:spcAft>
+                <a:spcPts val="400"/>
+              </a:spcAft>
+            </a:pPr>
+            <a:r>
+              <a:rPr lang="vi-VN" sz="1250" dirty="0">
+                <a:solidFill>
+                  <a:srgbClr val="444B52"/>
+                </a:solidFill>
+                <a:latin typeface="Arial"/>
+                <a:hlinkClick r:id="rId3"/>
+              </a:rPr>
+              <a:t>https://www.kaggle.com/datasets/sulianova/cardiovascular-disease-dataset</a:t>
             </a:r>
             <a:endParaRPr lang="vi-VN" sz="1250" dirty="0">
               <a:solidFill>
@@ -9048,29 +9065,6 @@
                 </a:solidFill>
                 <a:latin typeface="Arial"/>
                 <a:hlinkClick r:id="rId4"/>
-              </a:rPr>
-              <a:t>https://www.kaggle.com/datasets/sulianova/cardiovascular-disease-dataset</a:t>
-            </a:r>
-            <a:endParaRPr lang="vi-VN" sz="1250" dirty="0">
-              <a:solidFill>
-                <a:srgbClr val="444B52"/>
-              </a:solidFill>
-              <a:latin typeface="Arial"/>
-            </a:endParaRPr>
-          </a:p>
-          <a:p>
-            <a:pPr>
-              <a:spcAft>
-                <a:spcPts val="400"/>
-              </a:spcAft>
-            </a:pPr>
-            <a:r>
-              <a:rPr lang="vi-VN" sz="1250" dirty="0">
-                <a:solidFill>
-                  <a:srgbClr val="444B52"/>
-                </a:solidFill>
-                <a:latin typeface="Arial"/>
-                <a:hlinkClick r:id="rId5"/>
               </a:rPr>
               <a:t>https://www.kaggle.com/datasets/khan1803115/hypertension-risk-model-main</a:t>
             </a:r>

--- a/docs/Slide.pptx
+++ b/docs/Slide.pptx
@@ -637,550 +637,7 @@
           <a:bodyPr/>
           <a:lstStyle/>
           <a:p>
-            <a:r>
-              <a:rPr dirty="0" err="1"/>
-              <a:t>Câu</a:t>
-            </a:r>
-            <a:r>
-              <a:rPr dirty="0"/>
-              <a:t> </a:t>
-            </a:r>
-            <a:r>
-              <a:rPr dirty="0" err="1"/>
-              <a:t>hỏi</a:t>
-            </a:r>
-            <a:r>
-              <a:rPr dirty="0"/>
-              <a:t> </a:t>
-            </a:r>
-            <a:r>
-              <a:rPr dirty="0" err="1"/>
-              <a:t>có</a:t>
-            </a:r>
-            <a:r>
-              <a:rPr dirty="0"/>
-              <a:t> </a:t>
-            </a:r>
-            <a:r>
-              <a:rPr dirty="0" err="1"/>
-              <a:t>thể</a:t>
-            </a:r>
-            <a:r>
-              <a:rPr dirty="0"/>
-              <a:t> </a:t>
-            </a:r>
-            <a:r>
-              <a:rPr dirty="0" err="1"/>
-              <a:t>gặp</a:t>
-            </a:r>
-            <a:r>
-              <a:rPr dirty="0"/>
-              <a:t>:</a:t>
-            </a:r>
-          </a:p>
-          <a:p>
-            <a:r>
-              <a:rPr dirty="0"/>
-              <a:t>- '</a:t>
-            </a:r>
-            <a:r>
-              <a:rPr dirty="0" err="1"/>
-              <a:t>Có</a:t>
-            </a:r>
-            <a:r>
-              <a:rPr dirty="0"/>
-              <a:t> </a:t>
-            </a:r>
-            <a:r>
-              <a:rPr dirty="0" err="1"/>
-              <a:t>phải</a:t>
-            </a:r>
-            <a:r>
-              <a:rPr dirty="0"/>
-              <a:t> LLM </a:t>
-            </a:r>
-            <a:r>
-              <a:rPr dirty="0" err="1"/>
-              <a:t>không</a:t>
-            </a:r>
-            <a:r>
-              <a:rPr dirty="0"/>
-              <a:t>?' → </a:t>
-            </a:r>
-            <a:r>
-              <a:rPr dirty="0" err="1"/>
-              <a:t>Không</a:t>
-            </a:r>
-            <a:r>
-              <a:rPr dirty="0"/>
-              <a:t>; </a:t>
-            </a:r>
-            <a:r>
-              <a:rPr dirty="0" err="1"/>
-              <a:t>hỏi</a:t>
-            </a:r>
-            <a:r>
-              <a:rPr dirty="0"/>
-              <a:t> </a:t>
-            </a:r>
-            <a:r>
-              <a:rPr dirty="0" err="1"/>
-              <a:t>đáp</a:t>
-            </a:r>
-            <a:r>
-              <a:rPr dirty="0"/>
-              <a:t> </a:t>
-            </a:r>
-            <a:r>
-              <a:rPr dirty="0" err="1"/>
-              <a:t>hiện</a:t>
-            </a:r>
-            <a:r>
-              <a:rPr dirty="0"/>
-              <a:t> </a:t>
-            </a:r>
-            <a:r>
-              <a:rPr dirty="0" err="1"/>
-              <a:t>là</a:t>
-            </a:r>
-            <a:r>
-              <a:rPr dirty="0"/>
-              <a:t> rule-based </a:t>
-            </a:r>
-            <a:r>
-              <a:rPr dirty="0" err="1"/>
-              <a:t>có</a:t>
-            </a:r>
-            <a:r>
-              <a:rPr dirty="0"/>
-              <a:t> </a:t>
-            </a:r>
-            <a:r>
-              <a:rPr dirty="0" err="1"/>
-              <a:t>ràng</a:t>
-            </a:r>
-            <a:r>
-              <a:rPr dirty="0"/>
-              <a:t> </a:t>
-            </a:r>
-            <a:r>
-              <a:rPr dirty="0" err="1"/>
-              <a:t>buộc</a:t>
-            </a:r>
-            <a:r>
-              <a:rPr dirty="0"/>
-              <a:t> an </a:t>
-            </a:r>
-            <a:r>
-              <a:rPr dirty="0" err="1"/>
-              <a:t>toàn</a:t>
-            </a:r>
-            <a:r>
-              <a:rPr dirty="0"/>
-              <a:t>; LLM/RAG </a:t>
-            </a:r>
-            <a:r>
-              <a:rPr dirty="0" err="1"/>
-              <a:t>là</a:t>
-            </a:r>
-            <a:r>
-              <a:rPr dirty="0"/>
-              <a:t> </a:t>
-            </a:r>
-            <a:r>
-              <a:rPr dirty="0" err="1"/>
-              <a:t>hướng</a:t>
-            </a:r>
-            <a:r>
-              <a:rPr dirty="0"/>
-              <a:t> </a:t>
-            </a:r>
-            <a:r>
-              <a:rPr dirty="0" err="1"/>
-              <a:t>phát</a:t>
-            </a:r>
-            <a:r>
-              <a:rPr dirty="0"/>
-              <a:t> </a:t>
-            </a:r>
-            <a:r>
-              <a:rPr dirty="0" err="1"/>
-              <a:t>triển</a:t>
-            </a:r>
-            <a:r>
-              <a:rPr dirty="0"/>
-              <a:t>.</a:t>
-            </a:r>
-          </a:p>
-          <a:p>
-            <a:r>
-              <a:rPr dirty="0"/>
-              <a:t>- '</a:t>
-            </a:r>
-            <a:r>
-              <a:rPr dirty="0" err="1"/>
-              <a:t>Độ</a:t>
-            </a:r>
-            <a:r>
-              <a:rPr dirty="0"/>
-              <a:t> </a:t>
-            </a:r>
-            <a:r>
-              <a:rPr dirty="0" err="1"/>
-              <a:t>chính</a:t>
-            </a:r>
-            <a:r>
-              <a:rPr dirty="0"/>
-              <a:t> </a:t>
-            </a:r>
-            <a:r>
-              <a:rPr dirty="0" err="1"/>
-              <a:t>xác</a:t>
-            </a:r>
-            <a:r>
-              <a:rPr dirty="0"/>
-              <a:t> </a:t>
-            </a:r>
-            <a:r>
-              <a:rPr dirty="0" err="1"/>
-              <a:t>mô</a:t>
-            </a:r>
-            <a:r>
-              <a:rPr dirty="0"/>
-              <a:t> </a:t>
-            </a:r>
-            <a:r>
-              <a:rPr dirty="0" err="1"/>
-              <a:t>hình</a:t>
-            </a:r>
-            <a:r>
-              <a:rPr dirty="0"/>
-              <a:t>?' → </a:t>
-            </a:r>
-            <a:r>
-              <a:rPr dirty="0" err="1"/>
-              <a:t>nêu</a:t>
-            </a:r>
-            <a:r>
-              <a:rPr dirty="0"/>
-              <a:t> </a:t>
-            </a:r>
-            <a:r>
-              <a:rPr dirty="0" err="1"/>
-              <a:t>số</a:t>
-            </a:r>
-            <a:r>
-              <a:rPr dirty="0"/>
-              <a:t> </a:t>
-            </a:r>
-            <a:r>
-              <a:rPr dirty="0" err="1"/>
-              <a:t>từ</a:t>
-            </a:r>
-            <a:r>
-              <a:rPr dirty="0"/>
-              <a:t> </a:t>
-            </a:r>
-            <a:r>
-              <a:rPr dirty="0" err="1"/>
-              <a:t>src</a:t>
-            </a:r>
-            <a:r>
-              <a:rPr dirty="0"/>
-              <a:t>/models/*_</a:t>
-            </a:r>
-            <a:r>
-              <a:rPr dirty="0" err="1"/>
-              <a:t>evaluation.py</a:t>
-            </a:r>
-            <a:r>
-              <a:rPr dirty="0"/>
-              <a:t> (</a:t>
-            </a:r>
-            <a:r>
-              <a:rPr dirty="0" err="1"/>
-              <a:t>điền</a:t>
-            </a:r>
-            <a:r>
-              <a:rPr dirty="0"/>
-              <a:t> </a:t>
-            </a:r>
-            <a:r>
-              <a:rPr dirty="0" err="1"/>
-              <a:t>số</a:t>
-            </a:r>
-            <a:r>
-              <a:rPr dirty="0"/>
-              <a:t> </a:t>
-            </a:r>
-            <a:r>
-              <a:rPr dirty="0" err="1"/>
-              <a:t>thật</a:t>
-            </a:r>
-            <a:r>
-              <a:rPr dirty="0"/>
-              <a:t> </a:t>
-            </a:r>
-            <a:r>
-              <a:rPr dirty="0" err="1"/>
-              <a:t>trước</a:t>
-            </a:r>
-            <a:r>
-              <a:rPr dirty="0"/>
-              <a:t> </a:t>
-            </a:r>
-            <a:r>
-              <a:rPr dirty="0" err="1"/>
-              <a:t>khi</a:t>
-            </a:r>
-            <a:r>
-              <a:rPr dirty="0"/>
-              <a:t> </a:t>
-            </a:r>
-            <a:r>
-              <a:rPr dirty="0" err="1"/>
-              <a:t>trình</a:t>
-            </a:r>
-            <a:r>
-              <a:rPr dirty="0"/>
-              <a:t> </a:t>
-            </a:r>
-            <a:r>
-              <a:rPr dirty="0" err="1"/>
-              <a:t>bày</a:t>
-            </a:r>
-            <a:r>
-              <a:rPr dirty="0"/>
-              <a:t>).</a:t>
-            </a:r>
-          </a:p>
-          <a:p>
-            <a:r>
-              <a:rPr dirty="0"/>
-              <a:t>- '</a:t>
-            </a:r>
-            <a:r>
-              <a:rPr dirty="0" err="1"/>
-              <a:t>Vì</a:t>
-            </a:r>
-            <a:r>
-              <a:rPr dirty="0"/>
-              <a:t> </a:t>
-            </a:r>
-            <a:r>
-              <a:rPr dirty="0" err="1"/>
-              <a:t>sao</a:t>
-            </a:r>
-            <a:r>
-              <a:rPr dirty="0"/>
-              <a:t> </a:t>
-            </a:r>
-            <a:r>
-              <a:rPr dirty="0" err="1"/>
-              <a:t>chọn</a:t>
-            </a:r>
-            <a:r>
-              <a:rPr dirty="0"/>
-              <a:t> </a:t>
-            </a:r>
-            <a:r>
-              <a:rPr dirty="0" err="1"/>
-              <a:t>RandomForest</a:t>
-            </a:r>
-            <a:r>
-              <a:rPr dirty="0"/>
-              <a:t>?' → </a:t>
-            </a:r>
-            <a:r>
-              <a:rPr dirty="0" err="1"/>
-              <a:t>mạnh</a:t>
-            </a:r>
-            <a:r>
-              <a:rPr dirty="0"/>
-              <a:t> </a:t>
-            </a:r>
-            <a:r>
-              <a:rPr dirty="0" err="1"/>
-              <a:t>với</a:t>
-            </a:r>
-            <a:r>
-              <a:rPr dirty="0"/>
-              <a:t> </a:t>
-            </a:r>
-            <a:r>
-              <a:rPr dirty="0" err="1"/>
-              <a:t>dữ</a:t>
-            </a:r>
-            <a:r>
-              <a:rPr dirty="0"/>
-              <a:t> </a:t>
-            </a:r>
-            <a:r>
-              <a:rPr dirty="0" err="1"/>
-              <a:t>liệu</a:t>
-            </a:r>
-            <a:r>
-              <a:rPr dirty="0"/>
-              <a:t> </a:t>
-            </a:r>
-            <a:r>
-              <a:rPr dirty="0" err="1"/>
-              <a:t>bảng</a:t>
-            </a:r>
-            <a:r>
-              <a:rPr dirty="0"/>
-              <a:t>, </a:t>
-            </a:r>
-            <a:r>
-              <a:rPr dirty="0" err="1"/>
-              <a:t>ít</a:t>
-            </a:r>
-            <a:r>
-              <a:rPr dirty="0"/>
-              <a:t> overfit </a:t>
-            </a:r>
-            <a:r>
-              <a:rPr dirty="0" err="1"/>
-              <a:t>hơn</a:t>
-            </a:r>
-            <a:r>
-              <a:rPr dirty="0"/>
-              <a:t> 1 </a:t>
-            </a:r>
-            <a:r>
-              <a:rPr dirty="0" err="1"/>
-              <a:t>cây</a:t>
-            </a:r>
-            <a:r>
-              <a:rPr dirty="0"/>
-              <a:t>, </a:t>
-            </a:r>
-            <a:r>
-              <a:rPr dirty="0" err="1"/>
-              <a:t>hỗ</a:t>
-            </a:r>
-            <a:r>
-              <a:rPr dirty="0"/>
-              <a:t> </a:t>
-            </a:r>
-            <a:r>
-              <a:rPr dirty="0" err="1"/>
-              <a:t>trợ</a:t>
-            </a:r>
-            <a:r>
-              <a:rPr dirty="0"/>
-              <a:t> feature importance/SHAP.</a:t>
-            </a:r>
-          </a:p>
-          <a:p>
-            <a:r>
-              <a:rPr dirty="0"/>
-              <a:t>- '</a:t>
-            </a:r>
-            <a:r>
-              <a:rPr dirty="0" err="1"/>
-              <a:t>Xử</a:t>
-            </a:r>
-            <a:r>
-              <a:rPr dirty="0"/>
-              <a:t> </a:t>
-            </a:r>
-            <a:r>
-              <a:rPr dirty="0" err="1"/>
-              <a:t>lý</a:t>
-            </a:r>
-            <a:r>
-              <a:rPr dirty="0"/>
-              <a:t> </a:t>
-            </a:r>
-            <a:r>
-              <a:rPr dirty="0" err="1"/>
-              <a:t>mất</a:t>
-            </a:r>
-            <a:r>
-              <a:rPr dirty="0"/>
-              <a:t> </a:t>
-            </a:r>
-            <a:r>
-              <a:rPr dirty="0" err="1"/>
-              <a:t>cân</a:t>
-            </a:r>
-            <a:r>
-              <a:rPr dirty="0"/>
-              <a:t> </a:t>
-            </a:r>
-            <a:r>
-              <a:rPr dirty="0" err="1"/>
-              <a:t>bằng</a:t>
-            </a:r>
-            <a:r>
-              <a:rPr dirty="0"/>
-              <a:t> </a:t>
-            </a:r>
-            <a:r>
-              <a:rPr dirty="0" err="1"/>
-              <a:t>dữ</a:t>
-            </a:r>
-            <a:r>
-              <a:rPr dirty="0"/>
-              <a:t> </a:t>
-            </a:r>
-            <a:r>
-              <a:rPr dirty="0" err="1"/>
-              <a:t>liệu</a:t>
-            </a:r>
-            <a:r>
-              <a:rPr dirty="0"/>
-              <a:t>?' → </a:t>
-            </a:r>
-            <a:r>
-              <a:rPr dirty="0" err="1"/>
-              <a:t>tinh</a:t>
-            </a:r>
-            <a:r>
-              <a:rPr dirty="0"/>
-              <a:t> </a:t>
-            </a:r>
-            <a:r>
-              <a:rPr dirty="0" err="1"/>
-              <a:t>chỉnh</a:t>
-            </a:r>
-            <a:r>
-              <a:rPr dirty="0"/>
-              <a:t> threshold </a:t>
-            </a:r>
-            <a:r>
-              <a:rPr dirty="0" err="1"/>
-              <a:t>theo</a:t>
-            </a:r>
-            <a:r>
-              <a:rPr dirty="0"/>
-              <a:t> </a:t>
-            </a:r>
-            <a:r>
-              <a:rPr dirty="0" err="1"/>
-              <a:t>bệnh</a:t>
-            </a:r>
-            <a:r>
-              <a:rPr dirty="0"/>
-              <a:t> (0.40/0.35/0.35) </a:t>
-            </a:r>
-            <a:r>
-              <a:rPr dirty="0" err="1"/>
-              <a:t>thay</a:t>
-            </a:r>
-            <a:r>
-              <a:rPr dirty="0"/>
-              <a:t> </a:t>
-            </a:r>
-            <a:r>
-              <a:rPr dirty="0" err="1"/>
-              <a:t>vì</a:t>
-            </a:r>
-            <a:r>
-              <a:rPr dirty="0"/>
-              <a:t> 0.5.</a:t>
-            </a:r>
+            <a:endParaRPr dirty="0"/>
           </a:p>
         </p:txBody>
       </p:sp>

--- a/docs/Slide.pptx
+++ b/docs/Slide.pptx
@@ -4952,7 +4952,7 @@
         </p:blipFill>
         <p:spPr>
           <a:xfrm>
-            <a:off x="114076" y="2849099"/>
+            <a:off x="114076" y="2229313"/>
             <a:ext cx="11963542" cy="1503922"/>
           </a:xfrm>
           <a:prstGeom prst="rect">
@@ -5022,6 +5022,523 @@
           </a:p>
         </p:txBody>
       </p:sp>
+      <p:graphicFrame>
+        <p:nvGraphicFramePr>
+          <p:cNvPr id="4" name="Table 3">
+            <a:extLst>
+              <a:ext uri="{FF2B5EF4-FFF2-40B4-BE49-F238E27FC236}">
+                <a16:creationId xmlns:a16="http://schemas.microsoft.com/office/drawing/2014/main" id="{0E935882-F1C6-7624-DC88-6A02F36E731B}"/>
+              </a:ext>
+            </a:extLst>
+          </p:cNvPr>
+          <p:cNvGraphicFramePr>
+            <a:graphicFrameLocks noGrp="1"/>
+          </p:cNvGraphicFramePr>
+          <p:nvPr>
+            <p:extLst>
+              <p:ext uri="{D42A27DB-BD31-4B8C-83A1-F6EECF244321}">
+                <p14:modId xmlns:p14="http://schemas.microsoft.com/office/powerpoint/2010/main" val="2332454784"/>
+              </p:ext>
+            </p:extLst>
+          </p:nvPr>
+        </p:nvGraphicFramePr>
+        <p:xfrm>
+          <a:off x="2023380" y="4139509"/>
+          <a:ext cx="8144934" cy="2479142"/>
+        </p:xfrm>
+        <a:graphic>
+          <a:graphicData uri="http://schemas.openxmlformats.org/drawingml/2006/table">
+            <a:tbl>
+              <a:tblPr firstRow="1" firstCol="1" bandRow="1">
+                <a:tableStyleId>{5C22544A-7EE6-4342-B048-85BDC9FD1C3A}</a:tableStyleId>
+              </a:tblPr>
+              <a:tblGrid>
+                <a:gridCol w="2714978">
+                  <a:extLst>
+                    <a:ext uri="{9D8B030D-6E8A-4147-A177-3AD203B41FA5}">
+                      <a16:colId xmlns:a16="http://schemas.microsoft.com/office/drawing/2014/main" val="2812000451"/>
+                    </a:ext>
+                  </a:extLst>
+                </a:gridCol>
+                <a:gridCol w="2714978">
+                  <a:extLst>
+                    <a:ext uri="{9D8B030D-6E8A-4147-A177-3AD203B41FA5}">
+                      <a16:colId xmlns:a16="http://schemas.microsoft.com/office/drawing/2014/main" val="1365840392"/>
+                    </a:ext>
+                  </a:extLst>
+                </a:gridCol>
+                <a:gridCol w="2714978">
+                  <a:extLst>
+                    <a:ext uri="{9D8B030D-6E8A-4147-A177-3AD203B41FA5}">
+                      <a16:colId xmlns:a16="http://schemas.microsoft.com/office/drawing/2014/main" val="2450123132"/>
+                    </a:ext>
+                  </a:extLst>
+                </a:gridCol>
+              </a:tblGrid>
+              <a:tr h="404102">
+                <a:tc>
+                  <a:txBody>
+                    <a:bodyPr/>
+                    <a:lstStyle/>
+                    <a:p>
+                      <a:pPr>
+                        <a:lnSpc>
+                          <a:spcPct val="115000"/>
+                        </a:lnSpc>
+                        <a:spcAft>
+                          <a:spcPts val="1000"/>
+                        </a:spcAft>
+                        <a:buNone/>
+                      </a:pPr>
+                      <a:r>
+                        <a:rPr lang="en-US" sz="1600" dirty="0" err="1">
+                          <a:effectLst/>
+                        </a:rPr>
+                        <a:t>Mô</a:t>
+                      </a:r>
+                      <a:r>
+                        <a:rPr lang="en-US" sz="1600" dirty="0">
+                          <a:effectLst/>
+                        </a:rPr>
+                        <a:t> </a:t>
+                      </a:r>
+                      <a:r>
+                        <a:rPr lang="en-US" sz="1600" dirty="0" err="1">
+                          <a:effectLst/>
+                        </a:rPr>
+                        <a:t>hình</a:t>
+                      </a:r>
+                      <a:endParaRPr lang="en-VN" sz="2800" dirty="0">
+                        <a:effectLst/>
+                        <a:latin typeface="Times New Roman" panose="02020603050405020304" pitchFamily="18" charset="0"/>
+                        <a:ea typeface="Times New Roman" panose="02020603050405020304" pitchFamily="18" charset="0"/>
+                        <a:cs typeface="Times New Roman" panose="02020603050405020304" pitchFamily="18" charset="0"/>
+                      </a:endParaRPr>
+                    </a:p>
+                  </a:txBody>
+                  <a:tcPr marL="68580" marR="68580" marT="0" marB="0"/>
+                </a:tc>
+                <a:tc>
+                  <a:txBody>
+                    <a:bodyPr/>
+                    <a:lstStyle/>
+                    <a:p>
+                      <a:pPr>
+                        <a:lnSpc>
+                          <a:spcPct val="115000"/>
+                        </a:lnSpc>
+                        <a:spcAft>
+                          <a:spcPts val="1000"/>
+                        </a:spcAft>
+                        <a:buNone/>
+                      </a:pPr>
+                      <a:r>
+                        <a:rPr lang="en-US" sz="1600" dirty="0">
+                          <a:effectLst/>
+                        </a:rPr>
+                        <a:t>Recall</a:t>
+                      </a:r>
+                      <a:endParaRPr lang="en-VN" sz="2800" dirty="0">
+                        <a:effectLst/>
+                        <a:latin typeface="Times New Roman" panose="02020603050405020304" pitchFamily="18" charset="0"/>
+                        <a:ea typeface="Times New Roman" panose="02020603050405020304" pitchFamily="18" charset="0"/>
+                        <a:cs typeface="Times New Roman" panose="02020603050405020304" pitchFamily="18" charset="0"/>
+                      </a:endParaRPr>
+                    </a:p>
+                  </a:txBody>
+                  <a:tcPr marL="68580" marR="68580" marT="0" marB="0"/>
+                </a:tc>
+                <a:tc>
+                  <a:txBody>
+                    <a:bodyPr/>
+                    <a:lstStyle/>
+                    <a:p>
+                      <a:pPr>
+                        <a:lnSpc>
+                          <a:spcPct val="115000"/>
+                        </a:lnSpc>
+                        <a:spcAft>
+                          <a:spcPts val="1000"/>
+                        </a:spcAft>
+                        <a:buNone/>
+                      </a:pPr>
+                      <a:r>
+                        <a:rPr lang="vi-VN" sz="1600">
+                          <a:effectLst/>
+                        </a:rPr>
+                        <a:t>Macro F</a:t>
+                      </a:r>
+                      <a:r>
+                        <a:rPr lang="en-US" sz="1600">
+                          <a:effectLst/>
+                        </a:rPr>
+                        <a:t>1</a:t>
+                      </a:r>
+                      <a:endParaRPr lang="en-VN" sz="2800">
+                        <a:effectLst/>
+                        <a:latin typeface="Times New Roman" panose="02020603050405020304" pitchFamily="18" charset="0"/>
+                        <a:ea typeface="Times New Roman" panose="02020603050405020304" pitchFamily="18" charset="0"/>
+                        <a:cs typeface="Times New Roman" panose="02020603050405020304" pitchFamily="18" charset="0"/>
+                      </a:endParaRPr>
+                    </a:p>
+                  </a:txBody>
+                  <a:tcPr marL="68580" marR="68580" marT="0" marB="0"/>
+                </a:tc>
+                <a:extLst>
+                  <a:ext uri="{0D108BD9-81ED-4DB2-BD59-A6C34878D82A}">
+                    <a16:rowId xmlns:a16="http://schemas.microsoft.com/office/drawing/2014/main" val="92707987"/>
+                  </a:ext>
+                </a:extLst>
+              </a:tr>
+              <a:tr h="404102">
+                <a:tc>
+                  <a:txBody>
+                    <a:bodyPr/>
+                    <a:lstStyle/>
+                    <a:p>
+                      <a:pPr>
+                        <a:lnSpc>
+                          <a:spcPct val="115000"/>
+                        </a:lnSpc>
+                        <a:spcAft>
+                          <a:spcPts val="1000"/>
+                        </a:spcAft>
+                        <a:buNone/>
+                      </a:pPr>
+                      <a:r>
+                        <a:rPr lang="en-US" sz="1600" dirty="0">
+                          <a:effectLst/>
+                        </a:rPr>
+                        <a:t>Tim </a:t>
+                      </a:r>
+                      <a:r>
+                        <a:rPr lang="en-US" sz="1600" dirty="0" err="1">
+                          <a:effectLst/>
+                        </a:rPr>
+                        <a:t>mạch</a:t>
+                      </a:r>
+                      <a:endParaRPr lang="en-VN" sz="2800" dirty="0">
+                        <a:effectLst/>
+                        <a:latin typeface="Times New Roman" panose="02020603050405020304" pitchFamily="18" charset="0"/>
+                        <a:ea typeface="Times New Roman" panose="02020603050405020304" pitchFamily="18" charset="0"/>
+                        <a:cs typeface="Times New Roman" panose="02020603050405020304" pitchFamily="18" charset="0"/>
+                      </a:endParaRPr>
+                    </a:p>
+                  </a:txBody>
+                  <a:tcPr marL="68580" marR="68580" marT="0" marB="0"/>
+                </a:tc>
+                <a:tc>
+                  <a:txBody>
+                    <a:bodyPr/>
+                    <a:lstStyle/>
+                    <a:p>
+                      <a:pPr>
+                        <a:lnSpc>
+                          <a:spcPct val="115000"/>
+                        </a:lnSpc>
+                        <a:spcAft>
+                          <a:spcPts val="1000"/>
+                        </a:spcAft>
+                        <a:buNone/>
+                      </a:pPr>
+                      <a:r>
+                        <a:rPr lang="en-US" sz="1600">
+                          <a:effectLst/>
+                        </a:rPr>
+                        <a:t>0,786</a:t>
+                      </a:r>
+                      <a:endParaRPr lang="en-VN" sz="2800">
+                        <a:effectLst/>
+                        <a:latin typeface="Times New Roman" panose="02020603050405020304" pitchFamily="18" charset="0"/>
+                        <a:ea typeface="Times New Roman" panose="02020603050405020304" pitchFamily="18" charset="0"/>
+                        <a:cs typeface="Times New Roman" panose="02020603050405020304" pitchFamily="18" charset="0"/>
+                      </a:endParaRPr>
+                    </a:p>
+                  </a:txBody>
+                  <a:tcPr marL="68580" marR="68580" marT="0" marB="0"/>
+                </a:tc>
+                <a:tc>
+                  <a:txBody>
+                    <a:bodyPr/>
+                    <a:lstStyle/>
+                    <a:p>
+                      <a:pPr>
+                        <a:lnSpc>
+                          <a:spcPct val="115000"/>
+                        </a:lnSpc>
+                        <a:spcAft>
+                          <a:spcPts val="1000"/>
+                        </a:spcAft>
+                        <a:buNone/>
+                      </a:pPr>
+                      <a:r>
+                        <a:rPr lang="en-US" sz="1600">
+                          <a:effectLst/>
+                        </a:rPr>
+                        <a:t>0,739</a:t>
+                      </a:r>
+                      <a:endParaRPr lang="en-VN" sz="2800">
+                        <a:effectLst/>
+                        <a:latin typeface="Times New Roman" panose="02020603050405020304" pitchFamily="18" charset="0"/>
+                        <a:ea typeface="Times New Roman" panose="02020603050405020304" pitchFamily="18" charset="0"/>
+                        <a:cs typeface="Times New Roman" panose="02020603050405020304" pitchFamily="18" charset="0"/>
+                      </a:endParaRPr>
+                    </a:p>
+                  </a:txBody>
+                  <a:tcPr marL="68580" marR="68580" marT="0" marB="0"/>
+                </a:tc>
+                <a:extLst>
+                  <a:ext uri="{0D108BD9-81ED-4DB2-BD59-A6C34878D82A}">
+                    <a16:rowId xmlns:a16="http://schemas.microsoft.com/office/drawing/2014/main" val="3701987229"/>
+                  </a:ext>
+                </a:extLst>
+              </a:tr>
+              <a:tr h="835469">
+                <a:tc>
+                  <a:txBody>
+                    <a:bodyPr/>
+                    <a:lstStyle/>
+                    <a:p>
+                      <a:pPr>
+                        <a:lnSpc>
+                          <a:spcPct val="115000"/>
+                        </a:lnSpc>
+                        <a:spcAft>
+                          <a:spcPts val="1000"/>
+                        </a:spcAft>
+                        <a:buNone/>
+                      </a:pPr>
+                      <a:r>
+                        <a:rPr lang="en-US" sz="1600" dirty="0" err="1">
+                          <a:effectLst/>
+                        </a:rPr>
+                        <a:t>Đái</a:t>
+                      </a:r>
+                      <a:r>
+                        <a:rPr lang="en-US" sz="1600" dirty="0">
+                          <a:effectLst/>
+                        </a:rPr>
+                        <a:t> </a:t>
+                      </a:r>
+                      <a:r>
+                        <a:rPr lang="en-US" sz="1600" dirty="0" err="1">
+                          <a:effectLst/>
+                        </a:rPr>
+                        <a:t>tháo</a:t>
+                      </a:r>
+                      <a:r>
+                        <a:rPr lang="en-US" sz="1600" dirty="0">
+                          <a:effectLst/>
+                        </a:rPr>
+                        <a:t> </a:t>
+                      </a:r>
+                      <a:r>
+                        <a:rPr lang="en-US" sz="1600" dirty="0" err="1">
+                          <a:effectLst/>
+                        </a:rPr>
+                        <a:t>đường</a:t>
+                      </a:r>
+                      <a:endParaRPr lang="en-VN" sz="2800" dirty="0">
+                        <a:effectLst/>
+                        <a:latin typeface="Times New Roman" panose="02020603050405020304" pitchFamily="18" charset="0"/>
+                        <a:ea typeface="Times New Roman" panose="02020603050405020304" pitchFamily="18" charset="0"/>
+                        <a:cs typeface="Times New Roman" panose="02020603050405020304" pitchFamily="18" charset="0"/>
+                      </a:endParaRPr>
+                    </a:p>
+                  </a:txBody>
+                  <a:tcPr marL="68580" marR="68580" marT="0" marB="0"/>
+                </a:tc>
+                <a:tc>
+                  <a:txBody>
+                    <a:bodyPr/>
+                    <a:lstStyle/>
+                    <a:p>
+                      <a:pPr>
+                        <a:lnSpc>
+                          <a:spcPct val="115000"/>
+                        </a:lnSpc>
+                        <a:spcAft>
+                          <a:spcPts val="1000"/>
+                        </a:spcAft>
+                        <a:buNone/>
+                      </a:pPr>
+                      <a:r>
+                        <a:rPr lang="en-US" sz="1600" dirty="0">
+                          <a:effectLst/>
+                        </a:rPr>
+                        <a:t>0,796</a:t>
+                      </a:r>
+                      <a:endParaRPr lang="en-VN" sz="2800" dirty="0">
+                        <a:effectLst/>
+                        <a:latin typeface="Times New Roman" panose="02020603050405020304" pitchFamily="18" charset="0"/>
+                        <a:ea typeface="Times New Roman" panose="02020603050405020304" pitchFamily="18" charset="0"/>
+                        <a:cs typeface="Times New Roman" panose="02020603050405020304" pitchFamily="18" charset="0"/>
+                      </a:endParaRPr>
+                    </a:p>
+                  </a:txBody>
+                  <a:tcPr marL="68580" marR="68580" marT="0" marB="0"/>
+                </a:tc>
+                <a:tc>
+                  <a:txBody>
+                    <a:bodyPr/>
+                    <a:lstStyle/>
+                    <a:p>
+                      <a:pPr>
+                        <a:lnSpc>
+                          <a:spcPct val="115000"/>
+                        </a:lnSpc>
+                        <a:spcAft>
+                          <a:spcPts val="1000"/>
+                        </a:spcAft>
+                        <a:buNone/>
+                      </a:pPr>
+                      <a:r>
+                        <a:rPr lang="en-US" sz="1600">
+                          <a:effectLst/>
+                        </a:rPr>
+                        <a:t>0,729</a:t>
+                      </a:r>
+                      <a:endParaRPr lang="en-VN" sz="2800">
+                        <a:effectLst/>
+                        <a:latin typeface="Times New Roman" panose="02020603050405020304" pitchFamily="18" charset="0"/>
+                        <a:ea typeface="Times New Roman" panose="02020603050405020304" pitchFamily="18" charset="0"/>
+                        <a:cs typeface="Times New Roman" panose="02020603050405020304" pitchFamily="18" charset="0"/>
+                      </a:endParaRPr>
+                    </a:p>
+                  </a:txBody>
+                  <a:tcPr marL="68580" marR="68580" marT="0" marB="0"/>
+                </a:tc>
+                <a:extLst>
+                  <a:ext uri="{0D108BD9-81ED-4DB2-BD59-A6C34878D82A}">
+                    <a16:rowId xmlns:a16="http://schemas.microsoft.com/office/drawing/2014/main" val="1235218415"/>
+                  </a:ext>
+                </a:extLst>
+              </a:tr>
+              <a:tr h="835469">
+                <a:tc>
+                  <a:txBody>
+                    <a:bodyPr/>
+                    <a:lstStyle/>
+                    <a:p>
+                      <a:pPr>
+                        <a:lnSpc>
+                          <a:spcPct val="115000"/>
+                        </a:lnSpc>
+                        <a:spcAft>
+                          <a:spcPts val="1000"/>
+                        </a:spcAft>
+                        <a:buNone/>
+                      </a:pPr>
+                      <a:r>
+                        <a:rPr lang="en-US" sz="1600" dirty="0" err="1">
+                          <a:effectLst/>
+                        </a:rPr>
+                        <a:t>Tăng</a:t>
+                      </a:r>
+                      <a:r>
+                        <a:rPr lang="en-US" sz="1600" dirty="0">
+                          <a:effectLst/>
+                        </a:rPr>
+                        <a:t> </a:t>
+                      </a:r>
+                      <a:r>
+                        <a:rPr lang="en-US" sz="1600" dirty="0" err="1">
+                          <a:effectLst/>
+                        </a:rPr>
+                        <a:t>huyết</a:t>
+                      </a:r>
+                      <a:r>
+                        <a:rPr lang="en-US" sz="1600" dirty="0">
+                          <a:effectLst/>
+                        </a:rPr>
+                        <a:t> </a:t>
+                      </a:r>
+                      <a:r>
+                        <a:rPr lang="en-US" sz="1600" dirty="0" err="1">
+                          <a:effectLst/>
+                        </a:rPr>
+                        <a:t>áp</a:t>
+                      </a:r>
+                      <a:endParaRPr lang="en-VN" sz="2800" dirty="0">
+                        <a:effectLst/>
+                        <a:latin typeface="Times New Roman" panose="02020603050405020304" pitchFamily="18" charset="0"/>
+                        <a:ea typeface="Times New Roman" panose="02020603050405020304" pitchFamily="18" charset="0"/>
+                        <a:cs typeface="Times New Roman" panose="02020603050405020304" pitchFamily="18" charset="0"/>
+                      </a:endParaRPr>
+                    </a:p>
+                  </a:txBody>
+                  <a:tcPr marL="68580" marR="68580" marT="0" marB="0"/>
+                </a:tc>
+                <a:tc>
+                  <a:txBody>
+                    <a:bodyPr/>
+                    <a:lstStyle/>
+                    <a:p>
+                      <a:pPr>
+                        <a:lnSpc>
+                          <a:spcPct val="115000"/>
+                        </a:lnSpc>
+                        <a:spcAft>
+                          <a:spcPts val="1000"/>
+                        </a:spcAft>
+                        <a:buNone/>
+                      </a:pPr>
+                      <a:r>
+                        <a:rPr lang="en-US" sz="1600" dirty="0">
+                          <a:effectLst/>
+                        </a:rPr>
+                        <a:t>0,924</a:t>
+                      </a:r>
+                      <a:endParaRPr lang="en-VN" sz="2800" dirty="0">
+                        <a:effectLst/>
+                        <a:latin typeface="Times New Roman" panose="02020603050405020304" pitchFamily="18" charset="0"/>
+                        <a:ea typeface="Times New Roman" panose="02020603050405020304" pitchFamily="18" charset="0"/>
+                        <a:cs typeface="Times New Roman" panose="02020603050405020304" pitchFamily="18" charset="0"/>
+                      </a:endParaRPr>
+                    </a:p>
+                  </a:txBody>
+                  <a:tcPr marL="68580" marR="68580" marT="0" marB="0"/>
+                </a:tc>
+                <a:tc>
+                  <a:txBody>
+                    <a:bodyPr/>
+                    <a:lstStyle/>
+                    <a:p>
+                      <a:pPr>
+                        <a:lnSpc>
+                          <a:spcPct val="115000"/>
+                        </a:lnSpc>
+                        <a:spcAft>
+                          <a:spcPts val="1000"/>
+                        </a:spcAft>
+                        <a:buNone/>
+                      </a:pPr>
+                      <a:r>
+                        <a:rPr lang="en-US" sz="1600" dirty="0">
+                          <a:effectLst/>
+                        </a:rPr>
+                        <a:t>0,851</a:t>
+                      </a:r>
+                      <a:endParaRPr lang="en-VN" sz="2800" dirty="0">
+                        <a:effectLst/>
+                        <a:latin typeface="Times New Roman" panose="02020603050405020304" pitchFamily="18" charset="0"/>
+                        <a:ea typeface="Times New Roman" panose="02020603050405020304" pitchFamily="18" charset="0"/>
+                        <a:cs typeface="Times New Roman" panose="02020603050405020304" pitchFamily="18" charset="0"/>
+                      </a:endParaRPr>
+                    </a:p>
+                  </a:txBody>
+                  <a:tcPr marL="68580" marR="68580" marT="0" marB="0"/>
+                </a:tc>
+                <a:extLst>
+                  <a:ext uri="{0D108BD9-81ED-4DB2-BD59-A6C34878D82A}">
+                    <a16:rowId xmlns:a16="http://schemas.microsoft.com/office/drawing/2014/main" val="1405907190"/>
+                  </a:ext>
+                </a:extLst>
+              </a:tr>
+            </a:tbl>
+          </a:graphicData>
+        </a:graphic>
+      </p:graphicFrame>
     </p:spTree>
     <p:extLst>
       <p:ext uri="{BB962C8B-B14F-4D97-AF65-F5344CB8AC3E}">
@@ -6236,7 +6753,7 @@
         <p:spPr>
           <a:xfrm>
             <a:off x="503072" y="1713145"/>
-            <a:ext cx="11185855" cy="2221121"/>
+            <a:ext cx="11185855" cy="2169825"/>
           </a:xfrm>
           <a:prstGeom prst="rect">
             <a:avLst/>
@@ -6292,13 +6809,14 @@
               </a:rPr>
               <a:t>2 – Giải pháp</a:t>
             </a:r>
-          </a:p>
-          <a:p>
-            <a:pPr>
-              <a:spcAft>
-                <a:spcPts val="400"/>
-              </a:spcAft>
-            </a:pPr>
+            <a:br>
+              <a:rPr lang="vi-VN" sz="2400" b="1" dirty="0">
+                <a:solidFill>
+                  <a:srgbClr val="1B8A7A"/>
+                </a:solidFill>
+                <a:latin typeface="Arial"/>
+              </a:rPr>
+            </a:br>
             <a:r>
               <a:rPr lang="vi-VN" sz="2400" b="1" dirty="0">
                 <a:solidFill>

--- a/docs/Slide.pptx
+++ b/docs/Slide.pptx
@@ -5037,7 +5037,7 @@
           <p:nvPr>
             <p:extLst>
               <p:ext uri="{D42A27DB-BD31-4B8C-83A1-F6EECF244321}">
-                <p14:modId xmlns:p14="http://schemas.microsoft.com/office/powerpoint/2010/main" val="2332454784"/>
+                <p14:modId xmlns:p14="http://schemas.microsoft.com/office/powerpoint/2010/main" val="2436230018"/>
               </p:ext>
             </p:extLst>
           </p:nvPr>
@@ -5136,7 +5136,7 @@
                         <a:rPr lang="en-US" sz="1600" dirty="0">
                           <a:effectLst/>
                         </a:rPr>
-                        <a:t>Recall</a:t>
+                        <a:t>Recall (%)</a:t>
                       </a:r>
                       <a:endParaRPr lang="en-VN" sz="2800" dirty="0">
                         <a:effectLst/>
@@ -5163,18 +5163,18 @@
                         <a:buNone/>
                       </a:pPr>
                       <a:r>
-                        <a:rPr lang="vi-VN" sz="1600">
+                        <a:rPr lang="vi-VN" sz="1600" dirty="0">
                           <a:effectLst/>
                         </a:rPr>
                         <a:t>Macro F</a:t>
                       </a:r>
                       <a:r>
-                        <a:rPr lang="en-US" sz="1600">
+                        <a:rPr lang="en-US" sz="1600" dirty="0">
                           <a:effectLst/>
                         </a:rPr>
-                        <a:t>1</a:t>
+                        <a:t>1 (%)</a:t>
                       </a:r>
-                      <a:endParaRPr lang="en-VN" sz="2800">
+                      <a:endParaRPr lang="en-VN" sz="2800" dirty="0">
                         <a:effectLst/>
                         <a:latin typeface="Times New Roman" panose="02020603050405020304" pitchFamily="18" charset="0"/>
                         <a:ea typeface="Times New Roman" panose="02020603050405020304" pitchFamily="18" charset="0"/>
@@ -5242,12 +5242,12 @@
                         <a:buNone/>
                       </a:pPr>
                       <a:r>
-                        <a:rPr lang="en-US" sz="1600">
+                        <a:rPr lang="en-US" sz="1600" dirty="0">
                           <a:effectLst/>
                         </a:rPr>
-                        <a:t>0,786</a:t>
+                        <a:t>78,6%</a:t>
                       </a:r>
-                      <a:endParaRPr lang="en-VN" sz="2800">
+                      <a:endParaRPr lang="en-VN" sz="2800" dirty="0">
                         <a:effectLst/>
                         <a:latin typeface="Times New Roman" panose="02020603050405020304" pitchFamily="18" charset="0"/>
                         <a:ea typeface="Times New Roman" panose="02020603050405020304" pitchFamily="18" charset="0"/>
@@ -5272,12 +5272,12 @@
                         <a:buNone/>
                       </a:pPr>
                       <a:r>
-                        <a:rPr lang="en-US" sz="1600">
+                        <a:rPr lang="en-US" sz="1600" dirty="0">
                           <a:effectLst/>
                         </a:rPr>
-                        <a:t>0,739</a:t>
+                        <a:t>73,9%</a:t>
                       </a:r>
-                      <a:endParaRPr lang="en-VN" sz="2800">
+                      <a:endParaRPr lang="en-VN" sz="2800" dirty="0">
                         <a:effectLst/>
                         <a:latin typeface="Times New Roman" panose="02020603050405020304" pitchFamily="18" charset="0"/>
                         <a:ea typeface="Times New Roman" panose="02020603050405020304" pitchFamily="18" charset="0"/>
@@ -5366,7 +5366,7 @@
                         <a:rPr lang="en-US" sz="1600" dirty="0">
                           <a:effectLst/>
                         </a:rPr>
-                        <a:t>0,796</a:t>
+                        <a:t>79,6%</a:t>
                       </a:r>
                       <a:endParaRPr lang="en-VN" sz="2800" dirty="0">
                         <a:effectLst/>
@@ -5393,12 +5393,12 @@
                         <a:buNone/>
                       </a:pPr>
                       <a:r>
-                        <a:rPr lang="en-US" sz="1600">
+                        <a:rPr lang="en-US" sz="1600" dirty="0">
                           <a:effectLst/>
                         </a:rPr>
-                        <a:t>0,729</a:t>
+                        <a:t>72,9%</a:t>
                       </a:r>
-                      <a:endParaRPr lang="en-VN" sz="2800">
+                      <a:endParaRPr lang="en-VN" sz="2800" dirty="0">
                         <a:effectLst/>
                         <a:latin typeface="Times New Roman" panose="02020603050405020304" pitchFamily="18" charset="0"/>
                         <a:ea typeface="Times New Roman" panose="02020603050405020304" pitchFamily="18" charset="0"/>
@@ -5487,7 +5487,7 @@
                         <a:rPr lang="en-US" sz="1600" dirty="0">
                           <a:effectLst/>
                         </a:rPr>
-                        <a:t>0,924</a:t>
+                        <a:t>92,4%</a:t>
                       </a:r>
                       <a:endParaRPr lang="en-VN" sz="2800" dirty="0">
                         <a:effectLst/>
@@ -5517,7 +5517,7 @@
                         <a:rPr lang="en-US" sz="1600" dirty="0">
                           <a:effectLst/>
                         </a:rPr>
-                        <a:t>0,851</a:t>
+                        <a:t>85,1%</a:t>
                       </a:r>
                       <a:endParaRPr lang="en-VN" sz="2800" dirty="0">
                         <a:effectLst/>
